--- a/Kanta/halad/Ginoo Dawata.pptx
+++ b/Kanta/halad/Ginoo Dawata.pptx
@@ -201,7 +201,7 @@
           <a:p>
             <a:fld id="{2E860BF0-D007-460F-BF20-9BF0E803D277}" type="datetimeFigureOut">
               <a:rPr lang="en-US" smtClean="0"/>
-              <a:t>2/18/2026</a:t>
+              <a:t>3/8/2026</a:t>
             </a:fld>
             <a:endParaRPr lang="en-US"/>
           </a:p>
@@ -704,7 +704,7 @@
           <a:p>
             <a:fld id="{689CB065-93CC-4F93-97CB-5160E2F98F73}" type="datetimeFigureOut">
               <a:rPr lang="en-US" smtClean="0"/>
-              <a:t>2/18/2026</a:t>
+              <a:t>3/8/2026</a:t>
             </a:fld>
             <a:endParaRPr lang="en-US"/>
           </a:p>
@@ -902,7 +902,7 @@
           <a:p>
             <a:fld id="{689CB065-93CC-4F93-97CB-5160E2F98F73}" type="datetimeFigureOut">
               <a:rPr lang="en-US" smtClean="0"/>
-              <a:t>2/18/2026</a:t>
+              <a:t>3/8/2026</a:t>
             </a:fld>
             <a:endParaRPr lang="en-US"/>
           </a:p>
@@ -1110,7 +1110,7 @@
           <a:p>
             <a:fld id="{689CB065-93CC-4F93-97CB-5160E2F98F73}" type="datetimeFigureOut">
               <a:rPr lang="en-US" smtClean="0"/>
-              <a:t>2/18/2026</a:t>
+              <a:t>3/8/2026</a:t>
             </a:fld>
             <a:endParaRPr lang="en-US"/>
           </a:p>
@@ -1308,7 +1308,7 @@
           <a:p>
             <a:fld id="{689CB065-93CC-4F93-97CB-5160E2F98F73}" type="datetimeFigureOut">
               <a:rPr lang="en-US" smtClean="0"/>
-              <a:t>2/18/2026</a:t>
+              <a:t>3/8/2026</a:t>
             </a:fld>
             <a:endParaRPr lang="en-US"/>
           </a:p>
@@ -1583,7 +1583,7 @@
           <a:p>
             <a:fld id="{689CB065-93CC-4F93-97CB-5160E2F98F73}" type="datetimeFigureOut">
               <a:rPr lang="en-US" smtClean="0"/>
-              <a:t>2/18/2026</a:t>
+              <a:t>3/8/2026</a:t>
             </a:fld>
             <a:endParaRPr lang="en-US"/>
           </a:p>
@@ -1848,7 +1848,7 @@
           <a:p>
             <a:fld id="{689CB065-93CC-4F93-97CB-5160E2F98F73}" type="datetimeFigureOut">
               <a:rPr lang="en-US" smtClean="0"/>
-              <a:t>2/18/2026</a:t>
+              <a:t>3/8/2026</a:t>
             </a:fld>
             <a:endParaRPr lang="en-US"/>
           </a:p>
@@ -2260,7 +2260,7 @@
           <a:p>
             <a:fld id="{689CB065-93CC-4F93-97CB-5160E2F98F73}" type="datetimeFigureOut">
               <a:rPr lang="en-US" smtClean="0"/>
-              <a:t>2/18/2026</a:t>
+              <a:t>3/8/2026</a:t>
             </a:fld>
             <a:endParaRPr lang="en-US"/>
           </a:p>
@@ -2401,7 +2401,7 @@
           <a:p>
             <a:fld id="{689CB065-93CC-4F93-97CB-5160E2F98F73}" type="datetimeFigureOut">
               <a:rPr lang="en-US" smtClean="0"/>
-              <a:t>2/18/2026</a:t>
+              <a:t>3/8/2026</a:t>
             </a:fld>
             <a:endParaRPr lang="en-US"/>
           </a:p>
@@ -2514,7 +2514,7 @@
           <a:p>
             <a:fld id="{689CB065-93CC-4F93-97CB-5160E2F98F73}" type="datetimeFigureOut">
               <a:rPr lang="en-US" smtClean="0"/>
-              <a:t>2/18/2026</a:t>
+              <a:t>3/8/2026</a:t>
             </a:fld>
             <a:endParaRPr lang="en-US"/>
           </a:p>
@@ -2825,7 +2825,7 @@
           <a:p>
             <a:fld id="{689CB065-93CC-4F93-97CB-5160E2F98F73}" type="datetimeFigureOut">
               <a:rPr lang="en-US" smtClean="0"/>
-              <a:t>2/18/2026</a:t>
+              <a:t>3/8/2026</a:t>
             </a:fld>
             <a:endParaRPr lang="en-US"/>
           </a:p>
@@ -3113,7 +3113,7 @@
           <a:p>
             <a:fld id="{689CB065-93CC-4F93-97CB-5160E2F98F73}" type="datetimeFigureOut">
               <a:rPr lang="en-US" smtClean="0"/>
-              <a:t>2/18/2026</a:t>
+              <a:t>3/8/2026</a:t>
             </a:fld>
             <a:endParaRPr lang="en-US"/>
           </a:p>
@@ -3357,7 +3357,7 @@
           <a:p>
             <a:fld id="{689CB065-93CC-4F93-97CB-5160E2F98F73}" type="datetimeFigureOut">
               <a:rPr lang="en-US" smtClean="0"/>
-              <a:t>2/18/2026</a:t>
+              <a:t>3/8/2026</a:t>
             </a:fld>
             <a:endParaRPr lang="en-US"/>
           </a:p>
@@ -3949,7 +3949,7 @@
                 <a:latin typeface="Times New Roman" panose="02020603050405020304" pitchFamily="18" charset="0"/>
                 <a:cs typeface="Times New Roman" panose="02020603050405020304" pitchFamily="18" charset="0"/>
               </a:rPr>
-              <a:t>Datawang</a:t>
+              <a:t>Dawatang</a:t>
             </a:r>
             <a:r>
               <a:rPr lang="en-US" sz="10000" dirty="0">
@@ -4018,27 +4018,7 @@
                 <a:latin typeface="Times New Roman" panose="02020603050405020304" pitchFamily="18" charset="0"/>
                 <a:cs typeface="Times New Roman" panose="02020603050405020304" pitchFamily="18" charset="0"/>
               </a:rPr>
-              <a:t> Sa </a:t>
-            </a:r>
-            <a:r>
-              <a:rPr lang="en-US" sz="10000" dirty="0" err="1">
-                <a:solidFill>
-                  <a:schemeClr val="bg1"/>
-                </a:solidFill>
-                <a:latin typeface="Times New Roman" panose="02020603050405020304" pitchFamily="18" charset="0"/>
-                <a:cs typeface="Times New Roman" panose="02020603050405020304" pitchFamily="18" charset="0"/>
-              </a:rPr>
-              <a:t>Imong</a:t>
-            </a:r>
-            <a:r>
-              <a:rPr lang="en-US" sz="10000" dirty="0">
-                <a:solidFill>
-                  <a:schemeClr val="bg1"/>
-                </a:solidFill>
-                <a:latin typeface="Times New Roman" panose="02020603050405020304" pitchFamily="18" charset="0"/>
-                <a:cs typeface="Times New Roman" panose="02020603050405020304" pitchFamily="18" charset="0"/>
-              </a:rPr>
-              <a:t> </a:t>
+              <a:t> Sa Among </a:t>
             </a:r>
             <a:r>
               <a:rPr lang="en-US" sz="10000" dirty="0" err="1">
@@ -4332,6 +4312,26 @@
               </a:rPr>
               <a:t>Kahimut-i, </a:t>
             </a:r>
+            <a:r>
+              <a:rPr lang="sv-SE" sz="11700" dirty="0">
+                <a:solidFill>
+                  <a:schemeClr val="bg1"/>
+                </a:solidFill>
+                <a:latin typeface="Times New Roman" panose="02020603050405020304" pitchFamily="18" charset="0"/>
+                <a:cs typeface="Times New Roman" panose="02020603050405020304" pitchFamily="18" charset="0"/>
+              </a:rPr>
+              <a:t>Ang Among Gasa</a:t>
+            </a:r>
+            <a:r>
+              <a:rPr lang="sv-SE" sz="11733" dirty="0">
+                <a:solidFill>
+                  <a:schemeClr val="bg1"/>
+                </a:solidFill>
+                <a:latin typeface="Times New Roman" panose="02020603050405020304" pitchFamily="18" charset="0"/>
+                <a:cs typeface="Times New Roman" panose="02020603050405020304" pitchFamily="18" charset="0"/>
+              </a:rPr>
+              <a:t> </a:t>
+            </a:r>
             <a:endParaRPr lang="en-US" sz="11733" dirty="0">
               <a:solidFill>
                 <a:schemeClr val="bg1"/>
@@ -4395,25 +4395,6 @@
           <a:lstStyle/>
           <a:p>
             <a:pPr algn="ctr"/>
-            <a:r>
-              <a:rPr lang="sv-SE" sz="10666" dirty="0">
-                <a:solidFill>
-                  <a:schemeClr val="bg1"/>
-                </a:solidFill>
-                <a:latin typeface="Times New Roman" panose="02020603050405020304" pitchFamily="18" charset="0"/>
-                <a:cs typeface="Times New Roman" panose="02020603050405020304" pitchFamily="18" charset="0"/>
-              </a:rPr>
-              <a:t>Ang Among Gasa</a:t>
-            </a:r>
-            <a:br>
-              <a:rPr lang="sv-SE" sz="10666" dirty="0">
-                <a:solidFill>
-                  <a:schemeClr val="bg1"/>
-                </a:solidFill>
-                <a:latin typeface="Times New Roman" panose="02020603050405020304" pitchFamily="18" charset="0"/>
-                <a:cs typeface="Times New Roman" panose="02020603050405020304" pitchFamily="18" charset="0"/>
-              </a:rPr>
-            </a:br>
             <a:r>
               <a:rPr lang="sv-SE" sz="10666" dirty="0">
                 <a:solidFill>
